--- a/report/Nhom_15_GenAI.pptx
+++ b/report/Nhom_15_GenAI.pptx
@@ -11709,19 +11709,305 @@
               </a:defRPr>
             </a:pPr>
             <a:r>
-              <a:rPr sz="1275">
-                <a:solidFill>
-                  <a:srgbClr val="666666"/>
-                </a:solidFill>
-                <a:latin typeface="Lato"/>
-                <a:ea typeface="Lato"/>
-                <a:cs typeface="Lato"/>
-              </a:rPr>
-              <a:t>Checker tách mệnh đề, nhận diện aspect, số liệu sentiment và reason; sau đó đối chiếu từng claim.</a:t>
-            </a:r>
-          </a:p>
-          <a:p>
-            <a:endParaRPr sz="1275">
+              <a:rPr sz="1275" dirty="0">
+                <a:solidFill>
+                  <a:srgbClr val="666666"/>
+                </a:solidFill>
+                <a:latin typeface="Lato"/>
+                <a:ea typeface="Lato"/>
+                <a:cs typeface="Lato"/>
+              </a:rPr>
+              <a:t>Checker </a:t>
+            </a:r>
+            <a:r>
+              <a:rPr sz="1275" dirty="0" err="1">
+                <a:solidFill>
+                  <a:srgbClr val="666666"/>
+                </a:solidFill>
+                <a:latin typeface="Lato"/>
+                <a:ea typeface="Lato"/>
+                <a:cs typeface="Lato"/>
+              </a:rPr>
+              <a:t>tách</a:t>
+            </a:r>
+            <a:r>
+              <a:rPr sz="1275" dirty="0">
+                <a:solidFill>
+                  <a:srgbClr val="666666"/>
+                </a:solidFill>
+                <a:latin typeface="Lato"/>
+                <a:ea typeface="Lato"/>
+                <a:cs typeface="Lato"/>
+              </a:rPr>
+              <a:t> </a:t>
+            </a:r>
+            <a:r>
+              <a:rPr sz="1275" dirty="0" err="1">
+                <a:solidFill>
+                  <a:srgbClr val="666666"/>
+                </a:solidFill>
+                <a:latin typeface="Lato"/>
+                <a:ea typeface="Lato"/>
+                <a:cs typeface="Lato"/>
+              </a:rPr>
+              <a:t>mệnh</a:t>
+            </a:r>
+            <a:r>
+              <a:rPr sz="1275" dirty="0">
+                <a:solidFill>
+                  <a:srgbClr val="666666"/>
+                </a:solidFill>
+                <a:latin typeface="Lato"/>
+                <a:ea typeface="Lato"/>
+                <a:cs typeface="Lato"/>
+              </a:rPr>
+              <a:t> </a:t>
+            </a:r>
+            <a:r>
+              <a:rPr sz="1275" dirty="0" err="1">
+                <a:solidFill>
+                  <a:srgbClr val="666666"/>
+                </a:solidFill>
+                <a:latin typeface="Lato"/>
+                <a:ea typeface="Lato"/>
+                <a:cs typeface="Lato"/>
+              </a:rPr>
+              <a:t>đề</a:t>
+            </a:r>
+            <a:r>
+              <a:rPr sz="1275" dirty="0">
+                <a:solidFill>
+                  <a:srgbClr val="666666"/>
+                </a:solidFill>
+                <a:latin typeface="Lato"/>
+                <a:ea typeface="Lato"/>
+                <a:cs typeface="Lato"/>
+              </a:rPr>
+              <a:t>, </a:t>
+            </a:r>
+            <a:r>
+              <a:rPr sz="1275" dirty="0" err="1">
+                <a:solidFill>
+                  <a:srgbClr val="666666"/>
+                </a:solidFill>
+                <a:latin typeface="Lato"/>
+                <a:ea typeface="Lato"/>
+                <a:cs typeface="Lato"/>
+              </a:rPr>
+              <a:t>nhận</a:t>
+            </a:r>
+            <a:r>
+              <a:rPr sz="1275" dirty="0">
+                <a:solidFill>
+                  <a:srgbClr val="666666"/>
+                </a:solidFill>
+                <a:latin typeface="Lato"/>
+                <a:ea typeface="Lato"/>
+                <a:cs typeface="Lato"/>
+              </a:rPr>
+              <a:t> </a:t>
+            </a:r>
+            <a:r>
+              <a:rPr sz="1275" dirty="0" err="1">
+                <a:solidFill>
+                  <a:srgbClr val="666666"/>
+                </a:solidFill>
+                <a:latin typeface="Lato"/>
+                <a:ea typeface="Lato"/>
+                <a:cs typeface="Lato"/>
+              </a:rPr>
+              <a:t>diện</a:t>
+            </a:r>
+            <a:r>
+              <a:rPr sz="1275" dirty="0">
+                <a:solidFill>
+                  <a:srgbClr val="666666"/>
+                </a:solidFill>
+                <a:latin typeface="Lato"/>
+                <a:ea typeface="Lato"/>
+                <a:cs typeface="Lato"/>
+              </a:rPr>
+              <a:t> aspect, </a:t>
+            </a:r>
+            <a:r>
+              <a:rPr sz="1275" dirty="0" err="1">
+                <a:solidFill>
+                  <a:srgbClr val="666666"/>
+                </a:solidFill>
+                <a:latin typeface="Lato"/>
+                <a:ea typeface="Lato"/>
+                <a:cs typeface="Lato"/>
+              </a:rPr>
+              <a:t>số</a:t>
+            </a:r>
+            <a:r>
+              <a:rPr sz="1275" dirty="0">
+                <a:solidFill>
+                  <a:srgbClr val="666666"/>
+                </a:solidFill>
+                <a:latin typeface="Lato"/>
+                <a:ea typeface="Lato"/>
+                <a:cs typeface="Lato"/>
+              </a:rPr>
+              <a:t> </a:t>
+            </a:r>
+            <a:r>
+              <a:rPr sz="1275" dirty="0" err="1">
+                <a:solidFill>
+                  <a:srgbClr val="666666"/>
+                </a:solidFill>
+                <a:latin typeface="Lato"/>
+                <a:ea typeface="Lato"/>
+                <a:cs typeface="Lato"/>
+              </a:rPr>
+              <a:t>liệu</a:t>
+            </a:r>
+            <a:r>
+              <a:rPr sz="1275" dirty="0">
+                <a:solidFill>
+                  <a:srgbClr val="666666"/>
+                </a:solidFill>
+                <a:latin typeface="Lato"/>
+                <a:ea typeface="Lato"/>
+                <a:cs typeface="Lato"/>
+              </a:rPr>
+              <a:t> sentiment </a:t>
+            </a:r>
+            <a:r>
+              <a:rPr sz="1275" dirty="0" err="1">
+                <a:solidFill>
+                  <a:srgbClr val="666666"/>
+                </a:solidFill>
+                <a:latin typeface="Lato"/>
+                <a:ea typeface="Lato"/>
+                <a:cs typeface="Lato"/>
+              </a:rPr>
+              <a:t>và</a:t>
+            </a:r>
+            <a:r>
+              <a:rPr sz="1275" dirty="0">
+                <a:solidFill>
+                  <a:srgbClr val="666666"/>
+                </a:solidFill>
+                <a:latin typeface="Lato"/>
+                <a:ea typeface="Lato"/>
+                <a:cs typeface="Lato"/>
+              </a:rPr>
+              <a:t> reason; </a:t>
+            </a:r>
+            <a:r>
+              <a:rPr sz="1275" dirty="0" err="1">
+                <a:solidFill>
+                  <a:srgbClr val="666666"/>
+                </a:solidFill>
+                <a:latin typeface="Lato"/>
+                <a:ea typeface="Lato"/>
+                <a:cs typeface="Lato"/>
+              </a:rPr>
+              <a:t>sau</a:t>
+            </a:r>
+            <a:r>
+              <a:rPr sz="1275" dirty="0">
+                <a:solidFill>
+                  <a:srgbClr val="666666"/>
+                </a:solidFill>
+                <a:latin typeface="Lato"/>
+                <a:ea typeface="Lato"/>
+                <a:cs typeface="Lato"/>
+              </a:rPr>
+              <a:t> </a:t>
+            </a:r>
+            <a:r>
+              <a:rPr sz="1275" dirty="0" err="1">
+                <a:solidFill>
+                  <a:srgbClr val="666666"/>
+                </a:solidFill>
+                <a:latin typeface="Lato"/>
+                <a:ea typeface="Lato"/>
+                <a:cs typeface="Lato"/>
+              </a:rPr>
+              <a:t>đó</a:t>
+            </a:r>
+            <a:r>
+              <a:rPr sz="1275" dirty="0">
+                <a:solidFill>
+                  <a:srgbClr val="666666"/>
+                </a:solidFill>
+                <a:latin typeface="Lato"/>
+                <a:ea typeface="Lato"/>
+                <a:cs typeface="Lato"/>
+              </a:rPr>
+              <a:t> </a:t>
+            </a:r>
+            <a:r>
+              <a:rPr sz="1275" dirty="0" err="1">
+                <a:solidFill>
+                  <a:srgbClr val="666666"/>
+                </a:solidFill>
+                <a:latin typeface="Lato"/>
+                <a:ea typeface="Lato"/>
+                <a:cs typeface="Lato"/>
+              </a:rPr>
+              <a:t>đối</a:t>
+            </a:r>
+            <a:r>
+              <a:rPr sz="1275" dirty="0">
+                <a:solidFill>
+                  <a:srgbClr val="666666"/>
+                </a:solidFill>
+                <a:latin typeface="Lato"/>
+                <a:ea typeface="Lato"/>
+                <a:cs typeface="Lato"/>
+              </a:rPr>
+              <a:t> </a:t>
+            </a:r>
+            <a:r>
+              <a:rPr sz="1275" dirty="0" err="1">
+                <a:solidFill>
+                  <a:srgbClr val="666666"/>
+                </a:solidFill>
+                <a:latin typeface="Lato"/>
+                <a:ea typeface="Lato"/>
+                <a:cs typeface="Lato"/>
+              </a:rPr>
+              <a:t>chiếu</a:t>
+            </a:r>
+            <a:r>
+              <a:rPr sz="1275" dirty="0">
+                <a:solidFill>
+                  <a:srgbClr val="666666"/>
+                </a:solidFill>
+                <a:latin typeface="Lato"/>
+                <a:ea typeface="Lato"/>
+                <a:cs typeface="Lato"/>
+              </a:rPr>
+              <a:t> </a:t>
+            </a:r>
+            <a:r>
+              <a:rPr sz="1275" dirty="0" err="1">
+                <a:solidFill>
+                  <a:srgbClr val="666666"/>
+                </a:solidFill>
+                <a:latin typeface="Lato"/>
+                <a:ea typeface="Lato"/>
+                <a:cs typeface="Lato"/>
+              </a:rPr>
+              <a:t>từng</a:t>
+            </a:r>
+            <a:r>
+              <a:rPr sz="1275" dirty="0">
+                <a:solidFill>
+                  <a:srgbClr val="666666"/>
+                </a:solidFill>
+                <a:latin typeface="Lato"/>
+                <a:ea typeface="Lato"/>
+                <a:cs typeface="Lato"/>
+              </a:rPr>
+              <a:t> claim.</a:t>
+            </a:r>
+          </a:p>
+          <a:p>
+            <a:endParaRPr sz="1275" dirty="0">
               <a:solidFill>
                 <a:srgbClr val="666666"/>
               </a:solidFill>
@@ -11742,15 +12028,59 @@
               </a:defRPr>
             </a:pPr>
             <a:r>
-              <a:rPr sz="1275">
-                <a:solidFill>
-                  <a:srgbClr val="666666"/>
-                </a:solidFill>
-                <a:latin typeface="Lato"/>
-                <a:ea typeface="Lato"/>
-                <a:cs typeface="Lato"/>
-              </a:rPr>
-              <a:t>Restaurant: 4/4 claim hợp lệ → TRUE.</a:t>
+              <a:rPr sz="1275" dirty="0">
+                <a:solidFill>
+                  <a:srgbClr val="666666"/>
+                </a:solidFill>
+                <a:latin typeface="Lato"/>
+                <a:ea typeface="Lato"/>
+                <a:cs typeface="Lato"/>
+              </a:rPr>
+              <a:t>Restaurant: 4/4 claim </a:t>
+            </a:r>
+            <a:r>
+              <a:rPr sz="1275" dirty="0" err="1">
+                <a:solidFill>
+                  <a:srgbClr val="666666"/>
+                </a:solidFill>
+                <a:latin typeface="Lato"/>
+                <a:ea typeface="Lato"/>
+                <a:cs typeface="Lato"/>
+              </a:rPr>
+              <a:t>hợp</a:t>
+            </a:r>
+            <a:r>
+              <a:rPr sz="1275" dirty="0">
+                <a:solidFill>
+                  <a:srgbClr val="666666"/>
+                </a:solidFill>
+                <a:latin typeface="Lato"/>
+                <a:ea typeface="Lato"/>
+                <a:cs typeface="Lato"/>
+              </a:rPr>
+              <a:t> </a:t>
+            </a:r>
+            <a:r>
+              <a:rPr sz="1275" dirty="0" err="1">
+                <a:solidFill>
+                  <a:srgbClr val="666666"/>
+                </a:solidFill>
+                <a:latin typeface="Lato"/>
+                <a:ea typeface="Lato"/>
+                <a:cs typeface="Lato"/>
+              </a:rPr>
+              <a:t>lệ</a:t>
+            </a:r>
+            <a:r>
+              <a:rPr sz="1275" dirty="0">
+                <a:solidFill>
+                  <a:srgbClr val="666666"/>
+                </a:solidFill>
+                <a:latin typeface="Lato"/>
+                <a:ea typeface="Lato"/>
+                <a:cs typeface="Lato"/>
+              </a:rPr>
+              <a:t> → TRUE.</a:t>
             </a:r>
           </a:p>
         </p:txBody>
@@ -17582,39 +17912,6 @@
                 <a:cs typeface="Lato"/>
               </a:rPr>
               <a:t>chiếu</a:t>
-            </a:r>
-            <a:r>
-              <a:rPr sz="1275" dirty="0">
-                <a:solidFill>
-                  <a:srgbClr val="666666"/>
-                </a:solidFill>
-                <a:latin typeface="Lato"/>
-                <a:ea typeface="Lato"/>
-                <a:cs typeface="Lato"/>
-              </a:rPr>
-              <a:t> </a:t>
-            </a:r>
-            <a:r>
-              <a:rPr sz="1275" dirty="0" err="1">
-                <a:solidFill>
-                  <a:srgbClr val="666666"/>
-                </a:solidFill>
-                <a:latin typeface="Lato"/>
-                <a:ea typeface="Lato"/>
-                <a:cs typeface="Lato"/>
-              </a:rPr>
-              <a:t>AsteLookupBaseline</a:t>
-            </a:r>
-            <a:r>
-              <a:rPr lang="en-US" sz="1275" dirty="0">
-                <a:solidFill>
-                  <a:srgbClr val="666666"/>
-                </a:solidFill>
-                <a:latin typeface="Lato"/>
-                <a:ea typeface="Lato"/>
-                <a:cs typeface="Lato"/>
-              </a:rPr>
-              <a:t>, GTS-BERT</a:t>
             </a:r>
             <a:r>
               <a:rPr sz="1275" dirty="0">

--- a/report/Nhom_15_GenAI.pptx
+++ b/report/Nhom_15_GenAI.pptx
@@ -17773,28 +17773,6 @@
                 <a:ea typeface="Lato"/>
                 <a:cs typeface="Lato"/>
               </a:rPr>
-              <a:t> baseline </a:t>
-            </a:r>
-            <a:r>
-              <a:rPr sz="1800" b="1" dirty="0" err="1">
-                <a:solidFill>
-                  <a:srgbClr val="242424"/>
-                </a:solidFill>
-                <a:latin typeface="Lato"/>
-                <a:ea typeface="Lato"/>
-                <a:cs typeface="Lato"/>
-              </a:rPr>
-              <a:t>và</a:t>
-            </a:r>
-            <a:r>
-              <a:rPr sz="1800" b="1" dirty="0">
-                <a:solidFill>
-                  <a:srgbClr val="242424"/>
-                </a:solidFill>
-                <a:latin typeface="Lato"/>
-                <a:ea typeface="Lato"/>
-                <a:cs typeface="Lato"/>
-              </a:rPr>
               <a:t> </a:t>
             </a:r>
             <a:r>
@@ -17914,6 +17892,17 @@
               <a:t>chiếu</a:t>
             </a:r>
             <a:r>
+              <a:rPr sz="1275">
+                <a:solidFill>
+                  <a:srgbClr val="666666"/>
+                </a:solidFill>
+                <a:latin typeface="Lato"/>
+                <a:ea typeface="Lato"/>
+                <a:cs typeface="Lato"/>
+              </a:rPr>
+              <a:t> T5-small</a:t>
+            </a:r>
+            <a:r>
               <a:rPr sz="1275" dirty="0">
                 <a:solidFill>
                   <a:srgbClr val="666666"/>
@@ -17922,29 +17911,7 @@
                 <a:ea typeface="Lato"/>
                 <a:cs typeface="Lato"/>
               </a:rPr>
-              <a:t> </a:t>
-            </a:r>
-            <a:r>
-              <a:rPr sz="1275" dirty="0" err="1">
-                <a:solidFill>
-                  <a:srgbClr val="666666"/>
-                </a:solidFill>
-                <a:latin typeface="Lato"/>
-                <a:ea typeface="Lato"/>
-                <a:cs typeface="Lato"/>
-              </a:rPr>
-              <a:t>với</a:t>
-            </a:r>
-            <a:r>
-              <a:rPr sz="1275" dirty="0">
-                <a:solidFill>
-                  <a:srgbClr val="666666"/>
-                </a:solidFill>
-                <a:latin typeface="Lato"/>
-                <a:ea typeface="Lato"/>
-                <a:cs typeface="Lato"/>
-              </a:rPr>
-              <a:t> T5-small, T5-base, FLAN-T5-base </a:t>
+              <a:t>, T5-base, FLAN-T5-base </a:t>
             </a:r>
             <a:r>
               <a:rPr sz="1275" dirty="0" err="1">
